--- a/generated/Tier 1 Broker Scorecards/Insurance Planet_Broker_Scorecard.pptx
+++ b/generated/Tier 1 Broker Scorecards/Insurance Planet_Broker_Scorecard.pptx
@@ -3394,7 +3394,7 @@
                         <a:rPr sz="900">
                           <a:latin typeface="Segoe UI"/>
                         </a:rPr>
-                        <a:t>Tier 1  |  6.25% / 15.00%</a:t>
+                        <a:t>Tier 1  |  5.82% / 15.00%</a:t>
                       </a:r>
                     </a:p>
                   </a:txBody>
@@ -3653,7 +3653,7 @@
                         <a:rPr sz="900">
                           <a:latin typeface="Segoe UI"/>
                         </a:rPr>
-                        <a:t>Fleet Subs: 21  |  Binds: 2</a:t>
+                        <a:t>Fleet Subs: 22  |  Binds: 2</a:t>
                       </a:r>
                     </a:p>
                   </a:txBody>
@@ -3690,7 +3690,7 @@
                         <a:rPr sz="900">
                           <a:latin typeface="Segoe UI"/>
                         </a:rPr>
-                        <a:t>Fleet Bound Premium: $158,485.12</a:t>
+                        <a:t>Fleet Bound Premium: $167,259.88</a:t>
                       </a:r>
                     </a:p>
                   </a:txBody>
@@ -3727,7 +3727,7 @@
                         <a:rPr sz="900">
                           <a:latin typeface="Segoe UI"/>
                         </a:rPr>
-                        <a:t>Fleet Book %: 31.1%</a:t>
+                        <a:t>Fleet Book %: 32.8%</a:t>
                       </a:r>
                     </a:p>
                   </a:txBody>
@@ -3766,7 +3766,7 @@
                         <a:rPr sz="900">
                           <a:latin typeface="Segoe UI"/>
                         </a:rPr>
-                        <a:t>Non-Fleet Subs: 251  |  Binds: 15</a:t>
+                        <a:t>Non-Fleet Subs: 253  |  Binds: 14</a:t>
                       </a:r>
                     </a:p>
                   </a:txBody>
@@ -3803,7 +3803,7 @@
                         <a:rPr sz="900">
                           <a:latin typeface="Segoe UI"/>
                         </a:rPr>
-                        <a:t>Non-Fleet Bound Premium: $351,307.23</a:t>
+                        <a:t>Non-Fleet Bound Premium: $342,532.47</a:t>
                       </a:r>
                     </a:p>
                   </a:txBody>
@@ -3840,7 +3840,7 @@
                         <a:rPr sz="900">
                           <a:latin typeface="Segoe UI"/>
                         </a:rPr>
-                        <a:t>Non-Fleet Book %: 68.9%</a:t>
+                        <a:t>Non-Fleet Book %: 67.2%</a:t>
                       </a:r>
                     </a:p>
                   </a:txBody>
@@ -4428,7 +4428,7 @@
                           </a:solidFill>
                           <a:latin typeface="Segoe UI"/>
                         </a:rPr>
-                        <a:t>72</a:t>
+                        <a:t>75</a:t>
                       </a:r>
                     </a:p>
                   </a:txBody>
@@ -4581,7 +4581,7 @@
                         <a:rPr sz="800">
                           <a:latin typeface="Segoe UI"/>
                         </a:rPr>
-                        <a:t>9.8%</a:t>
+                        <a:t>11.8%</a:t>
                       </a:r>
                     </a:p>
                   </a:txBody>
@@ -4664,7 +4664,7 @@
                         <a:rPr sz="800">
                           <a:latin typeface="Segoe UI"/>
                         </a:rPr>
-                        <a:t>16.4%</a:t>
+                        <a:t>14.5%</a:t>
                       </a:r>
                     </a:p>
                   </a:txBody>
@@ -4707,7 +4707,7 @@
                           </a:solidFill>
                           <a:latin typeface="Segoe UI"/>
                         </a:rPr>
-                        <a:t>12.5%</a:t>
+                        <a:t>12.0%</a:t>
                       </a:r>
                     </a:p>
                   </a:txBody>
@@ -4866,7 +4866,7 @@
                         <a:rPr sz="800">
                           <a:latin typeface="Segoe UI"/>
                         </a:rPr>
-                        <a:t>5</a:t>
+                        <a:t>6</a:t>
                       </a:r>
                     </a:p>
                   </a:txBody>
@@ -4943,7 +4943,7 @@
                         <a:rPr sz="800">
                           <a:latin typeface="Segoe UI"/>
                         </a:rPr>
-                        <a:t>9</a:t>
+                        <a:t>8</a:t>
                       </a:r>
                     </a:p>
                   </a:txBody>
@@ -4978,6 +4978,9 @@
                       <a:pPr algn="ctr"/>
                       <a:r>
                         <a:rPr sz="800">
+                          <a:solidFill>
+                            <a:srgbClr val="059669"/>
+                          </a:solidFill>
                           <a:latin typeface="Segoe UI"/>
                         </a:rPr>
                         <a:t>9</a:t>

--- a/generated/Tier 1 Broker Scorecards/Insurance Planet_Broker_Scorecard.pptx
+++ b/generated/Tier 1 Broker Scorecards/Insurance Planet_Broker_Scorecard.pptx
@@ -3394,7 +3394,7 @@
                         <a:rPr sz="900">
                           <a:latin typeface="Segoe UI"/>
                         </a:rPr>
-                        <a:t>Tier 1  |  5.82% / 15.00%</a:t>
+                        <a:t>Tier 1  |  5.71% / 15.00%</a:t>
                       </a:r>
                     </a:p>
                   </a:txBody>
@@ -3653,7 +3653,7 @@
                         <a:rPr sz="900">
                           <a:latin typeface="Segoe UI"/>
                         </a:rPr>
-                        <a:t>Fleet Subs: 22  |  Binds: 2</a:t>
+                        <a:t>Fleet Subs: 24  |  Binds: 2</a:t>
                       </a:r>
                     </a:p>
                   </a:txBody>
@@ -3766,7 +3766,7 @@
                         <a:rPr sz="900">
                           <a:latin typeface="Segoe UI"/>
                         </a:rPr>
-                        <a:t>Non-Fleet Subs: 253  |  Binds: 14</a:t>
+                        <a:t>Non-Fleet Subs: 256  |  Binds: 14</a:t>
                       </a:r>
                     </a:p>
                   </a:txBody>
@@ -4428,7 +4428,7 @@
                           </a:solidFill>
                           <a:latin typeface="Segoe UI"/>
                         </a:rPr>
-                        <a:t>75</a:t>
+                        <a:t>80</a:t>
                       </a:r>
                     </a:p>
                   </a:txBody>
@@ -4664,7 +4664,7 @@
                         <a:rPr sz="800">
                           <a:latin typeface="Segoe UI"/>
                         </a:rPr>
-                        <a:t>14.5%</a:t>
+                        <a:t>16.4%</a:t>
                       </a:r>
                     </a:p>
                   </a:txBody>
@@ -4707,7 +4707,7 @@
                           </a:solidFill>
                           <a:latin typeface="Segoe UI"/>
                         </a:rPr>
-                        <a:t>12.0%</a:t>
+                        <a:t>11.2%</a:t>
                       </a:r>
                     </a:p>
                   </a:txBody>
@@ -4747,7 +4747,7 @@
                         <a:rPr sz="800">
                           <a:latin typeface="Segoe UI"/>
                         </a:rPr>
-                        <a:t>13.8%</a:t>
+                        <a:t>12.6%</a:t>
                       </a:r>
                     </a:p>
                   </a:txBody>
@@ -4943,46 +4943,6 @@
                         <a:rPr sz="800">
                           <a:latin typeface="Segoe UI"/>
                         </a:rPr>
-                        <a:t>8</a:t>
-                      </a:r>
-                    </a:p>
-                  </a:txBody>
-                  <a:tcPr marL="114300" marR="91425" marT="45700" marB="45700">
-                    <a:lnL w="6350" cap="flat" cmpd="sng">
-                      <a:solidFill>
-                        <a:srgbClr val="E5E7EB"/>
-                      </a:solidFill>
-                    </a:lnL>
-                    <a:lnR w="6350" cap="flat" cmpd="sng">
-                      <a:solidFill>
-                        <a:srgbClr val="E5E7EB"/>
-                      </a:solidFill>
-                    </a:lnR>
-                    <a:lnT w="6350" cap="flat" cmpd="sng">
-                      <a:solidFill>
-                        <a:srgbClr val="E5E7EB"/>
-                      </a:solidFill>
-                    </a:lnT>
-                    <a:lnB w="6350" cap="flat" cmpd="sng">
-                      <a:solidFill>
-                        <a:srgbClr val="E5E7EB"/>
-                      </a:solidFill>
-                    </a:lnB>
-                  </a:tcPr>
-                </a:tc>
-                <a:tc>
-                  <a:txBody>
-                    <a:bodyPr/>
-                    <a:lstStyle/>
-                    <a:p>
-                      <a:pPr algn="ctr"/>
-                      <a:r>
-                        <a:rPr sz="800">
-                          <a:solidFill>
-                            <a:srgbClr val="059669"/>
-                          </a:solidFill>
-                          <a:latin typeface="Segoe UI"/>
-                        </a:rPr>
                         <a:t>9</a:t>
                       </a:r>
                     </a:p>
@@ -5020,7 +4980,44 @@
                         <a:rPr sz="800">
                           <a:latin typeface="Segoe UI"/>
                         </a:rPr>
-                        <a:t>12</a:t>
+                        <a:t>9</a:t>
+                      </a:r>
+                    </a:p>
+                  </a:txBody>
+                  <a:tcPr marL="114300" marR="91425" marT="45700" marB="45700">
+                    <a:lnL w="6350" cap="flat" cmpd="sng">
+                      <a:solidFill>
+                        <a:srgbClr val="E5E7EB"/>
+                      </a:solidFill>
+                    </a:lnL>
+                    <a:lnR w="6350" cap="flat" cmpd="sng">
+                      <a:solidFill>
+                        <a:srgbClr val="E5E7EB"/>
+                      </a:solidFill>
+                    </a:lnR>
+                    <a:lnT w="6350" cap="flat" cmpd="sng">
+                      <a:solidFill>
+                        <a:srgbClr val="E5E7EB"/>
+                      </a:solidFill>
+                    </a:lnT>
+                    <a:lnB w="6350" cap="flat" cmpd="sng">
+                      <a:solidFill>
+                        <a:srgbClr val="E5E7EB"/>
+                      </a:solidFill>
+                    </a:lnB>
+                  </a:tcPr>
+                </a:tc>
+                <a:tc>
+                  <a:txBody>
+                    <a:bodyPr/>
+                    <a:lstStyle/>
+                    <a:p>
+                      <a:pPr algn="ctr"/>
+                      <a:r>
+                        <a:rPr sz="800">
+                          <a:latin typeface="Segoe UI"/>
+                        </a:rPr>
+                        <a:t>11</a:t>
                       </a:r>
                     </a:p>
                   </a:txBody>

--- a/generated/Tier 1 Broker Scorecards/Insurance Planet_Broker_Scorecard.pptx
+++ b/generated/Tier 1 Broker Scorecards/Insurance Planet_Broker_Scorecard.pptx
@@ -3357,7 +3357,7 @@
                         <a:rPr sz="800">
                           <a:latin typeface="Segoe UI"/>
                         </a:rPr>
-                        <a:t>$1,163,462.77 / $1,291,901.23 / $509,792.35</a:t>
+                        <a:t>$1,163,462.77 / $1,304,434.63 / $522,325.75</a:t>
                       </a:r>
                     </a:p>
                   </a:txBody>
@@ -3394,7 +3394,7 @@
                         <a:rPr sz="900">
                           <a:latin typeface="Segoe UI"/>
                         </a:rPr>
-                        <a:t>Tier 1  |  5.71% / 15.00%</a:t>
+                        <a:t>Tier 1  |  6.71% / 15.00%</a:t>
                       </a:r>
                     </a:p>
                   </a:txBody>
@@ -3431,7 +3431,7 @@
                         <a:rPr sz="900">
                           <a:latin typeface="Segoe UI"/>
                         </a:rPr>
-                        <a:t>$1,628,847.88  (31.3% achieved)</a:t>
+                        <a:t>$1,628,847.88  (32.1% achieved)</a:t>
                       </a:r>
                     </a:p>
                   </a:txBody>
@@ -3653,7 +3653,7 @@
                         <a:rPr sz="900">
                           <a:latin typeface="Segoe UI"/>
                         </a:rPr>
-                        <a:t>Fleet Subs: 24  |  Binds: 2</a:t>
+                        <a:t>Fleet Subs: 25  |  Binds: 2</a:t>
                       </a:r>
                     </a:p>
                   </a:txBody>
@@ -3690,7 +3690,7 @@
                         <a:rPr sz="900">
                           <a:latin typeface="Segoe UI"/>
                         </a:rPr>
-                        <a:t>Fleet Bound Premium: $167,259.88</a:t>
+                        <a:t>Fleet Bound Premium: $154,217.24</a:t>
                       </a:r>
                     </a:p>
                   </a:txBody>
@@ -3727,7 +3727,7 @@
                         <a:rPr sz="900">
                           <a:latin typeface="Segoe UI"/>
                         </a:rPr>
-                        <a:t>Fleet Book %: 32.8%</a:t>
+                        <a:t>Fleet Book %: 29.5%</a:t>
                       </a:r>
                     </a:p>
                   </a:txBody>
@@ -3766,7 +3766,7 @@
                         <a:rPr sz="900">
                           <a:latin typeface="Segoe UI"/>
                         </a:rPr>
-                        <a:t>Non-Fleet Subs: 256  |  Binds: 14</a:t>
+                        <a:t>Non-Fleet Subs: 258  |  Binds: 17</a:t>
                       </a:r>
                     </a:p>
                   </a:txBody>
@@ -3803,7 +3803,7 @@
                         <a:rPr sz="900">
                           <a:latin typeface="Segoe UI"/>
                         </a:rPr>
-                        <a:t>Non-Fleet Bound Premium: $342,532.47</a:t>
+                        <a:t>Non-Fleet Bound Premium: $368,108.51</a:t>
                       </a:r>
                     </a:p>
                   </a:txBody>
@@ -3840,7 +3840,7 @@
                         <a:rPr sz="900">
                           <a:latin typeface="Segoe UI"/>
                         </a:rPr>
-                        <a:t>Non-Fleet Book %: 67.2%</a:t>
+                        <a:t>Non-Fleet Book %: 70.5%</a:t>
                       </a:r>
                     </a:p>
                   </a:txBody>
@@ -4428,7 +4428,7 @@
                           </a:solidFill>
                           <a:latin typeface="Segoe UI"/>
                         </a:rPr>
-                        <a:t>80</a:t>
+                        <a:t>83</a:t>
                       </a:r>
                     </a:p>
                   </a:txBody>
@@ -4581,7 +4581,7 @@
                         <a:rPr sz="800">
                           <a:latin typeface="Segoe UI"/>
                         </a:rPr>
-                        <a:t>11.8%</a:t>
+                        <a:t>9.8%</a:t>
                       </a:r>
                     </a:p>
                   </a:txBody>
@@ -4707,7 +4707,7 @@
                           </a:solidFill>
                           <a:latin typeface="Segoe UI"/>
                         </a:rPr>
-                        <a:t>11.2%</a:t>
+                        <a:t>14.5%</a:t>
                       </a:r>
                     </a:p>
                   </a:txBody>
@@ -4747,7 +4747,7 @@
                         <a:rPr sz="800">
                           <a:latin typeface="Segoe UI"/>
                         </a:rPr>
-                        <a:t>12.6%</a:t>
+                        <a:t>13.8%</a:t>
                       </a:r>
                     </a:p>
                   </a:txBody>
@@ -4866,7 +4866,7 @@
                         <a:rPr sz="800">
                           <a:latin typeface="Segoe UI"/>
                         </a:rPr>
-                        <a:t>6</a:t>
+                        <a:t>5</a:t>
                       </a:r>
                     </a:p>
                   </a:txBody>
@@ -4978,9 +4978,12 @@
                       <a:pPr algn="ctr"/>
                       <a:r>
                         <a:rPr sz="800">
+                          <a:solidFill>
+                            <a:srgbClr val="059669"/>
+                          </a:solidFill>
                           <a:latin typeface="Segoe UI"/>
                         </a:rPr>
-                        <a:t>9</a:t>
+                        <a:t>12</a:t>
                       </a:r>
                     </a:p>
                   </a:txBody>
@@ -5017,7 +5020,7 @@
                         <a:rPr sz="800">
                           <a:latin typeface="Segoe UI"/>
                         </a:rPr>
-                        <a:t>11</a:t>
+                        <a:t>12</a:t>
                       </a:r>
                     </a:p>
                   </a:txBody>
@@ -5259,7 +5262,7 @@
                           </a:solidFill>
                           <a:latin typeface="Segoe UI"/>
                         </a:rPr>
-                        <a:t>$203.7K</a:t>
+                        <a:t>$216.3K</a:t>
                       </a:r>
                     </a:p>
                   </a:txBody>

--- a/generated/Tier 1 Broker Scorecards/Insurance Planet_Broker_Scorecard.pptx
+++ b/generated/Tier 1 Broker Scorecards/Insurance Planet_Broker_Scorecard.pptx
@@ -3357,7 +3357,7 @@
                         <a:rPr sz="800">
                           <a:latin typeface="Segoe UI"/>
                         </a:rPr>
-                        <a:t>$1,163,462.77 / $1,304,434.63 / $522,325.75</a:t>
+                        <a:t>$1,163,462.77 / $1,320,436.80 / $538,327.92</a:t>
                       </a:r>
                     </a:p>
                   </a:txBody>
@@ -3394,7 +3394,7 @@
                         <a:rPr sz="900">
                           <a:latin typeface="Segoe UI"/>
                         </a:rPr>
-                        <a:t>Tier 1  |  6.71% / 15.00%</a:t>
+                        <a:t>Tier 1  |  6.94% / 15.00%</a:t>
                       </a:r>
                     </a:p>
                   </a:txBody>
@@ -3431,7 +3431,7 @@
                         <a:rPr sz="900">
                           <a:latin typeface="Segoe UI"/>
                         </a:rPr>
-                        <a:t>$1,628,847.88  (32.1% achieved)</a:t>
+                        <a:t>$1,628,847.88  (33.0% achieved)</a:t>
                       </a:r>
                     </a:p>
                   </a:txBody>
@@ -3653,7 +3653,7 @@
                         <a:rPr sz="900">
                           <a:latin typeface="Segoe UI"/>
                         </a:rPr>
-                        <a:t>Fleet Subs: 25  |  Binds: 2</a:t>
+                        <a:t>Fleet Subs: 27  |  Binds: 2</a:t>
                       </a:r>
                     </a:p>
                   </a:txBody>
@@ -3690,7 +3690,7 @@
                         <a:rPr sz="900">
                           <a:latin typeface="Segoe UI"/>
                         </a:rPr>
-                        <a:t>Fleet Bound Premium: $154,217.24</a:t>
+                        <a:t>Fleet Bound Premium: $153,127.74</a:t>
                       </a:r>
                     </a:p>
                   </a:txBody>
@@ -3727,7 +3727,7 @@
                         <a:rPr sz="900">
                           <a:latin typeface="Segoe UI"/>
                         </a:rPr>
-                        <a:t>Fleet Book %: 29.5%</a:t>
+                        <a:t>Fleet Book %: 28.4%</a:t>
                       </a:r>
                     </a:p>
                   </a:txBody>
@@ -3766,7 +3766,7 @@
                         <a:rPr sz="900">
                           <a:latin typeface="Segoe UI"/>
                         </a:rPr>
-                        <a:t>Non-Fleet Subs: 258  |  Binds: 17</a:t>
+                        <a:t>Non-Fleet Subs: 261  |  Binds: 18</a:t>
                       </a:r>
                     </a:p>
                   </a:txBody>
@@ -3803,7 +3803,7 @@
                         <a:rPr sz="900">
                           <a:latin typeface="Segoe UI"/>
                         </a:rPr>
-                        <a:t>Non-Fleet Bound Premium: $368,108.51</a:t>
+                        <a:t>Non-Fleet Bound Premium: $385,200.18</a:t>
                       </a:r>
                     </a:p>
                   </a:txBody>
@@ -3840,7 +3840,7 @@
                         <a:rPr sz="900">
                           <a:latin typeface="Segoe UI"/>
                         </a:rPr>
-                        <a:t>Non-Fleet Book %: 70.5%</a:t>
+                        <a:t>Non-Fleet Book %: 71.6%</a:t>
                       </a:r>
                     </a:p>
                   </a:txBody>
@@ -4428,7 +4428,7 @@
                           </a:solidFill>
                           <a:latin typeface="Segoe UI"/>
                         </a:rPr>
-                        <a:t>83</a:t>
+                        <a:t>88</a:t>
                       </a:r>
                     </a:p>
                   </a:txBody>
@@ -4664,7 +4664,7 @@
                         <a:rPr sz="800">
                           <a:latin typeface="Segoe UI"/>
                         </a:rPr>
-                        <a:t>16.4%</a:t>
+                        <a:t>14.5%</a:t>
                       </a:r>
                     </a:p>
                   </a:txBody>
@@ -4703,11 +4703,11 @@
                       <a:r>
                         <a:rPr sz="800">
                           <a:solidFill>
-                            <a:srgbClr val="DC2626"/>
+                            <a:srgbClr val="059669"/>
                           </a:solidFill>
                           <a:latin typeface="Segoe UI"/>
                         </a:rPr>
-                        <a:t>14.5%</a:t>
+                        <a:t>14.8%</a:t>
                       </a:r>
                     </a:p>
                   </a:txBody>
@@ -4747,7 +4747,7 @@
                         <a:rPr sz="800">
                           <a:latin typeface="Segoe UI"/>
                         </a:rPr>
-                        <a:t>13.8%</a:t>
+                        <a:t>12.6%</a:t>
                       </a:r>
                     </a:p>
                   </a:txBody>
@@ -4943,7 +4943,7 @@
                         <a:rPr sz="800">
                           <a:latin typeface="Segoe UI"/>
                         </a:rPr>
-                        <a:t>9</a:t>
+                        <a:t>8</a:t>
                       </a:r>
                     </a:p>
                   </a:txBody>
@@ -4983,7 +4983,7 @@
                           </a:solidFill>
                           <a:latin typeface="Segoe UI"/>
                         </a:rPr>
-                        <a:t>12</a:t>
+                        <a:t>13</a:t>
                       </a:r>
                     </a:p>
                   </a:txBody>
@@ -5020,7 +5020,7 @@
                         <a:rPr sz="800">
                           <a:latin typeface="Segoe UI"/>
                         </a:rPr>
-                        <a:t>12</a:t>
+                        <a:t>11</a:t>
                       </a:r>
                     </a:p>
                   </a:txBody>
@@ -5262,7 +5262,7 @@
                           </a:solidFill>
                           <a:latin typeface="Segoe UI"/>
                         </a:rPr>
-                        <a:t>$216.3K</a:t>
+                        <a:t>$232.3K</a:t>
                       </a:r>
                     </a:p>
                   </a:txBody>

--- a/generated/Tier 1 Broker Scorecards/Insurance Planet_Broker_Scorecard.pptx
+++ b/generated/Tier 1 Broker Scorecards/Insurance Planet_Broker_Scorecard.pptx
@@ -3357,7 +3357,7 @@
                         <a:rPr sz="800">
                           <a:latin typeface="Segoe UI"/>
                         </a:rPr>
-                        <a:t>$1,163,462.77 / $1,320,436.80 / $538,327.92</a:t>
+                        <a:t>$1,163,462.77 / $1,390,937.73 / $608,828.85</a:t>
                       </a:r>
                     </a:p>
                   </a:txBody>
@@ -3394,7 +3394,7 @@
                         <a:rPr sz="900">
                           <a:latin typeface="Segoe UI"/>
                         </a:rPr>
-                        <a:t>Tier 1  |  6.94% / 15.00%</a:t>
+                        <a:t>Tier 1  |  6.87% / 15.00%</a:t>
                       </a:r>
                     </a:p>
                   </a:txBody>
@@ -3431,7 +3431,7 @@
                         <a:rPr sz="900">
                           <a:latin typeface="Segoe UI"/>
                         </a:rPr>
-                        <a:t>$1,628,847.88  (33.0% achieved)</a:t>
+                        <a:t>$1,628,847.88  (37.4% achieved)</a:t>
                       </a:r>
                     </a:p>
                   </a:txBody>
@@ -3653,7 +3653,7 @@
                         <a:rPr sz="900">
                           <a:latin typeface="Segoe UI"/>
                         </a:rPr>
-                        <a:t>Fleet Subs: 27  |  Binds: 2</a:t>
+                        <a:t>Fleet Subs: 28  |  Binds: 3</a:t>
                       </a:r>
                     </a:p>
                   </a:txBody>
@@ -3690,7 +3690,7 @@
                         <a:rPr sz="900">
                           <a:latin typeface="Segoe UI"/>
                         </a:rPr>
-                        <a:t>Fleet Bound Premium: $153,127.74</a:t>
+                        <a:t>Fleet Bound Premium: $246,152.80</a:t>
                       </a:r>
                     </a:p>
                   </a:txBody>
@@ -3727,7 +3727,7 @@
                         <a:rPr sz="900">
                           <a:latin typeface="Segoe UI"/>
                         </a:rPr>
-                        <a:t>Fleet Book %: 28.4%</a:t>
+                        <a:t>Fleet Book %: 40.4%</a:t>
                       </a:r>
                     </a:p>
                   </a:txBody>
@@ -3766,7 +3766,7 @@
                         <a:rPr sz="900">
                           <a:latin typeface="Segoe UI"/>
                         </a:rPr>
-                        <a:t>Non-Fleet Subs: 261  |  Binds: 18</a:t>
+                        <a:t>Non-Fleet Subs: 263  |  Binds: 17</a:t>
                       </a:r>
                     </a:p>
                   </a:txBody>
@@ -3803,7 +3803,7 @@
                         <a:rPr sz="900">
                           <a:latin typeface="Segoe UI"/>
                         </a:rPr>
-                        <a:t>Non-Fleet Bound Premium: $385,200.18</a:t>
+                        <a:t>Non-Fleet Bound Premium: $362,676.05</a:t>
                       </a:r>
                     </a:p>
                   </a:txBody>
@@ -3840,7 +3840,7 @@
                         <a:rPr sz="900">
                           <a:latin typeface="Segoe UI"/>
                         </a:rPr>
-                        <a:t>Non-Fleet Book %: 71.6%</a:t>
+                        <a:t>Non-Fleet Book %: 59.6%</a:t>
                       </a:r>
                     </a:p>
                   </a:txBody>
@@ -4428,7 +4428,7 @@
                           </a:solidFill>
                           <a:latin typeface="Segoe UI"/>
                         </a:rPr>
-                        <a:t>88</a:t>
+                        <a:t>91</a:t>
                       </a:r>
                     </a:p>
                   </a:txBody>
@@ -4581,7 +4581,7 @@
                         <a:rPr sz="800">
                           <a:latin typeface="Segoe UI"/>
                         </a:rPr>
-                        <a:t>9.8%</a:t>
+                        <a:t>11.8%</a:t>
                       </a:r>
                     </a:p>
                   </a:txBody>
@@ -4703,11 +4703,11 @@
                       <a:r>
                         <a:rPr sz="800">
                           <a:solidFill>
-                            <a:srgbClr val="059669"/>
+                            <a:srgbClr val="DC2626"/>
                           </a:solidFill>
                           <a:latin typeface="Segoe UI"/>
                         </a:rPr>
-                        <a:t>14.8%</a:t>
+                        <a:t>13.2%</a:t>
                       </a:r>
                     </a:p>
                   </a:txBody>
@@ -4747,7 +4747,7 @@
                         <a:rPr sz="800">
                           <a:latin typeface="Segoe UI"/>
                         </a:rPr>
-                        <a:t>12.6%</a:t>
+                        <a:t>13.8%</a:t>
                       </a:r>
                     </a:p>
                   </a:txBody>
@@ -4866,7 +4866,7 @@
                         <a:rPr sz="800">
                           <a:latin typeface="Segoe UI"/>
                         </a:rPr>
-                        <a:t>5</a:t>
+                        <a:t>6</a:t>
                       </a:r>
                     </a:p>
                   </a:txBody>
@@ -4983,7 +4983,7 @@
                           </a:solidFill>
                           <a:latin typeface="Segoe UI"/>
                         </a:rPr>
-                        <a:t>13</a:t>
+                        <a:t>12</a:t>
                       </a:r>
                     </a:p>
                   </a:txBody>
@@ -5020,7 +5020,7 @@
                         <a:rPr sz="800">
                           <a:latin typeface="Segoe UI"/>
                         </a:rPr>
-                        <a:t>11</a:t>
+                        <a:t>12</a:t>
                       </a:r>
                     </a:p>
                   </a:txBody>
@@ -5262,7 +5262,7 @@
                           </a:solidFill>
                           <a:latin typeface="Segoe UI"/>
                         </a:rPr>
-                        <a:t>$232.3K</a:t>
+                        <a:t>$302.8K</a:t>
                       </a:r>
                     </a:p>
                   </a:txBody>

--- a/generated/Tier 1 Broker Scorecards/Insurance Planet_Broker_Scorecard.pptx
+++ b/generated/Tier 1 Broker Scorecards/Insurance Planet_Broker_Scorecard.pptx
@@ -4664,7 +4664,7 @@
                         <a:rPr sz="800">
                           <a:latin typeface="Segoe UI"/>
                         </a:rPr>
-                        <a:t>14.5%</a:t>
+                        <a:t>16.4%</a:t>
                       </a:r>
                     </a:p>
                   </a:txBody>
@@ -4747,7 +4747,7 @@
                         <a:rPr sz="800">
                           <a:latin typeface="Segoe UI"/>
                         </a:rPr>
-                        <a:t>13.8%</a:t>
+                        <a:t>12.6%</a:t>
                       </a:r>
                     </a:p>
                   </a:txBody>
@@ -4943,7 +4943,7 @@
                         <a:rPr sz="800">
                           <a:latin typeface="Segoe UI"/>
                         </a:rPr>
-                        <a:t>8</a:t>
+                        <a:t>9</a:t>
                       </a:r>
                     </a:p>
                   </a:txBody>
@@ -5020,7 +5020,7 @@
                         <a:rPr sz="800">
                           <a:latin typeface="Segoe UI"/>
                         </a:rPr>
-                        <a:t>12</a:t>
+                        <a:t>11</a:t>
                       </a:r>
                     </a:p>
                   </a:txBody>

--- a/generated/Tier 1 Broker Scorecards/Insurance Planet_Broker_Scorecard.pptx
+++ b/generated/Tier 1 Broker Scorecards/Insurance Planet_Broker_Scorecard.pptx
@@ -4581,7 +4581,7 @@
                         <a:rPr sz="800">
                           <a:latin typeface="Segoe UI"/>
                         </a:rPr>
-                        <a:t>11.8%</a:t>
+                        <a:t>9.8%</a:t>
                       </a:r>
                     </a:p>
                   </a:txBody>
@@ -4866,7 +4866,7 @@
                         <a:rPr sz="800">
                           <a:latin typeface="Segoe UI"/>
                         </a:rPr>
-                        <a:t>6</a:t>
+                        <a:t>5</a:t>
                       </a:r>
                     </a:p>
                   </a:txBody>

--- a/generated/Tier 1 Broker Scorecards/Insurance Planet_Broker_Scorecard.pptx
+++ b/generated/Tier 1 Broker Scorecards/Insurance Planet_Broker_Scorecard.pptx
@@ -3394,7 +3394,7 @@
                         <a:rPr sz="900">
                           <a:latin typeface="Segoe UI"/>
                         </a:rPr>
-                        <a:t>Tier 1  |  6.87% / 15.00%</a:t>
+                        <a:t>Tier 1  |  6.83% / 15.00%</a:t>
                       </a:r>
                     </a:p>
                   </a:txBody>
@@ -3766,7 +3766,7 @@
                         <a:rPr sz="900">
                           <a:latin typeface="Segoe UI"/>
                         </a:rPr>
-                        <a:t>Non-Fleet Subs: 263  |  Binds: 17</a:t>
+                        <a:t>Non-Fleet Subs: 265  |  Binds: 17</a:t>
                       </a:r>
                     </a:p>
                   </a:txBody>
@@ -4428,7 +4428,7 @@
                           </a:solidFill>
                           <a:latin typeface="Segoe UI"/>
                         </a:rPr>
-                        <a:t>91</a:t>
+                        <a:t>93</a:t>
                       </a:r>
                     </a:p>
                   </a:txBody>
@@ -4707,7 +4707,7 @@
                           </a:solidFill>
                           <a:latin typeface="Segoe UI"/>
                         </a:rPr>
-                        <a:t>13.2%</a:t>
+                        <a:t>12.9%</a:t>
                       </a:r>
                     </a:p>
                   </a:txBody>

--- a/generated/Tier 1 Broker Scorecards/Insurance Planet_Broker_Scorecard.pptx
+++ b/generated/Tier 1 Broker Scorecards/Insurance Planet_Broker_Scorecard.pptx
@@ -3394,7 +3394,7 @@
                         <a:rPr sz="900">
                           <a:latin typeface="Segoe UI"/>
                         </a:rPr>
-                        <a:t>Tier 1  |  6.83% / 15.00%</a:t>
+                        <a:t>Tier 1  |  7.14% / 15.00%</a:t>
                       </a:r>
                     </a:p>
                   </a:txBody>
@@ -3690,7 +3690,7 @@
                         <a:rPr sz="900">
                           <a:latin typeface="Segoe UI"/>
                         </a:rPr>
-                        <a:t>Fleet Bound Premium: $246,152.80</a:t>
+                        <a:t>Fleet Bound Premium: $234,306.20</a:t>
                       </a:r>
                     </a:p>
                   </a:txBody>
@@ -3727,7 +3727,7 @@
                         <a:rPr sz="900">
                           <a:latin typeface="Segoe UI"/>
                         </a:rPr>
-                        <a:t>Fleet Book %: 40.4%</a:t>
+                        <a:t>Fleet Book %: 38.5%</a:t>
                       </a:r>
                     </a:p>
                   </a:txBody>
@@ -3766,7 +3766,7 @@
                         <a:rPr sz="900">
                           <a:latin typeface="Segoe UI"/>
                         </a:rPr>
-                        <a:t>Non-Fleet Subs: 265  |  Binds: 17</a:t>
+                        <a:t>Non-Fleet Subs: 266  |  Binds: 18</a:t>
                       </a:r>
                     </a:p>
                   </a:txBody>
@@ -3803,7 +3803,7 @@
                         <a:rPr sz="900">
                           <a:latin typeface="Segoe UI"/>
                         </a:rPr>
-                        <a:t>Non-Fleet Bound Premium: $362,676.05</a:t>
+                        <a:t>Non-Fleet Bound Premium: $374,522.65</a:t>
                       </a:r>
                     </a:p>
                   </a:txBody>
@@ -3840,7 +3840,7 @@
                         <a:rPr sz="900">
                           <a:latin typeface="Segoe UI"/>
                         </a:rPr>
-                        <a:t>Non-Fleet Book %: 59.6%</a:t>
+                        <a:t>Non-Fleet Book %: 61.5%</a:t>
                       </a:r>
                     </a:p>
                   </a:txBody>
@@ -4428,7 +4428,7 @@
                           </a:solidFill>
                           <a:latin typeface="Segoe UI"/>
                         </a:rPr>
-                        <a:t>93</a:t>
+                        <a:t>94</a:t>
                       </a:r>
                     </a:p>
                   </a:txBody>
@@ -4581,7 +4581,7 @@
                         <a:rPr sz="800">
                           <a:latin typeface="Segoe UI"/>
                         </a:rPr>
-                        <a:t>9.8%</a:t>
+                        <a:t>11.8%</a:t>
                       </a:r>
                     </a:p>
                   </a:txBody>
@@ -4707,7 +4707,7 @@
                           </a:solidFill>
                           <a:latin typeface="Segoe UI"/>
                         </a:rPr>
-                        <a:t>12.9%</a:t>
+                        <a:t>13.8%</a:t>
                       </a:r>
                     </a:p>
                   </a:txBody>
@@ -4866,7 +4866,7 @@
                         <a:rPr sz="800">
                           <a:latin typeface="Segoe UI"/>
                         </a:rPr>
-                        <a:t>5</a:t>
+                        <a:t>6</a:t>
                       </a:r>
                     </a:p>
                   </a:txBody>
@@ -4983,7 +4983,7 @@
                           </a:solidFill>
                           <a:latin typeface="Segoe UI"/>
                         </a:rPr>
-                        <a:t>12</a:t>
+                        <a:t>13</a:t>
                       </a:r>
                     </a:p>
                   </a:txBody>

--- a/generated/Tier 1 Broker Scorecards/Insurance Planet_Broker_Scorecard.pptx
+++ b/generated/Tier 1 Broker Scorecards/Insurance Planet_Broker_Scorecard.pptx
@@ -3394,7 +3394,7 @@
                         <a:rPr sz="900">
                           <a:latin typeface="Segoe UI"/>
                         </a:rPr>
-                        <a:t>Tier 1  |  7.14% / 15.00%</a:t>
+                        <a:t>Tier 1  |  7.46% / 15.00%</a:t>
                       </a:r>
                     </a:p>
                   </a:txBody>
@@ -3690,7 +3690,7 @@
                         <a:rPr sz="900">
                           <a:latin typeface="Segoe UI"/>
                         </a:rPr>
-                        <a:t>Fleet Bound Premium: $234,306.20</a:t>
+                        <a:t>Fleet Bound Premium: $225,074.00</a:t>
                       </a:r>
                     </a:p>
                   </a:txBody>
@@ -3727,7 +3727,7 @@
                         <a:rPr sz="900">
                           <a:latin typeface="Segoe UI"/>
                         </a:rPr>
-                        <a:t>Fleet Book %: 38.5%</a:t>
+                        <a:t>Fleet Book %: 37.0%</a:t>
                       </a:r>
                     </a:p>
                   </a:txBody>
@@ -3766,7 +3766,7 @@
                         <a:rPr sz="900">
                           <a:latin typeface="Segoe UI"/>
                         </a:rPr>
-                        <a:t>Non-Fleet Subs: 266  |  Binds: 18</a:t>
+                        <a:t>Non-Fleet Subs: 267  |  Binds: 19</a:t>
                       </a:r>
                     </a:p>
                   </a:txBody>
@@ -3803,7 +3803,7 @@
                         <a:rPr sz="900">
                           <a:latin typeface="Segoe UI"/>
                         </a:rPr>
-                        <a:t>Non-Fleet Bound Premium: $374,522.65</a:t>
+                        <a:t>Non-Fleet Bound Premium: $383,754.85</a:t>
                       </a:r>
                     </a:p>
                   </a:txBody>
@@ -3840,7 +3840,7 @@
                         <a:rPr sz="900">
                           <a:latin typeface="Segoe UI"/>
                         </a:rPr>
-                        <a:t>Non-Fleet Book %: 61.5%</a:t>
+                        <a:t>Non-Fleet Book %: 63.0%</a:t>
                       </a:r>
                     </a:p>
                   </a:txBody>
@@ -4428,7 +4428,7 @@
                           </a:solidFill>
                           <a:latin typeface="Segoe UI"/>
                         </a:rPr>
-                        <a:t>94</a:t>
+                        <a:t>95</a:t>
                       </a:r>
                     </a:p>
                   </a:txBody>
@@ -4664,7 +4664,7 @@
                         <a:rPr sz="800">
                           <a:latin typeface="Segoe UI"/>
                         </a:rPr>
-                        <a:t>16.4%</a:t>
+                        <a:t>14.5%</a:t>
                       </a:r>
                     </a:p>
                   </a:txBody>
@@ -4707,7 +4707,7 @@
                           </a:solidFill>
                           <a:latin typeface="Segoe UI"/>
                         </a:rPr>
-                        <a:t>13.8%</a:t>
+                        <a:t>13.7%</a:t>
                       </a:r>
                     </a:p>
                   </a:txBody>
@@ -4747,7 +4747,7 @@
                         <a:rPr sz="800">
                           <a:latin typeface="Segoe UI"/>
                         </a:rPr>
-                        <a:t>12.6%</a:t>
+                        <a:t>13.8%</a:t>
                       </a:r>
                     </a:p>
                   </a:txBody>
@@ -4943,7 +4943,7 @@
                         <a:rPr sz="800">
                           <a:latin typeface="Segoe UI"/>
                         </a:rPr>
-                        <a:t>9</a:t>
+                        <a:t>8</a:t>
                       </a:r>
                     </a:p>
                   </a:txBody>
@@ -5020,7 +5020,7 @@
                         <a:rPr sz="800">
                           <a:latin typeface="Segoe UI"/>
                         </a:rPr>
-                        <a:t>11</a:t>
+                        <a:t>12</a:t>
                       </a:r>
                     </a:p>
                   </a:txBody>

--- a/generated/Tier 1 Broker Scorecards/Insurance Planet_Broker_Scorecard.pptx
+++ b/generated/Tier 1 Broker Scorecards/Insurance Planet_Broker_Scorecard.pptx
@@ -3394,7 +3394,7 @@
                         <a:rPr sz="900">
                           <a:latin typeface="Segoe UI"/>
                         </a:rPr>
-                        <a:t>Tier 1  |  7.46% / 15.00%</a:t>
+                        <a:t>Tier 1  |  7.43% / 15.00%</a:t>
                       </a:r>
                     </a:p>
                   </a:txBody>
@@ -3766,7 +3766,7 @@
                         <a:rPr sz="900">
                           <a:latin typeface="Segoe UI"/>
                         </a:rPr>
-                        <a:t>Non-Fleet Subs: 267  |  Binds: 19</a:t>
+                        <a:t>Non-Fleet Subs: 268  |  Binds: 19</a:t>
                       </a:r>
                     </a:p>
                   </a:txBody>
@@ -4428,7 +4428,7 @@
                           </a:solidFill>
                           <a:latin typeface="Segoe UI"/>
                         </a:rPr>
-                        <a:t>95</a:t>
+                        <a:t>96</a:t>
                       </a:r>
                     </a:p>
                   </a:txBody>
@@ -4707,7 +4707,7 @@
                           </a:solidFill>
                           <a:latin typeface="Segoe UI"/>
                         </a:rPr>
-                        <a:t>13.7%</a:t>
+                        <a:t>13.5%</a:t>
                       </a:r>
                     </a:p>
                   </a:txBody>
@@ -4747,7 +4747,7 @@
                         <a:rPr sz="800">
                           <a:latin typeface="Segoe UI"/>
                         </a:rPr>
-                        <a:t>13.8%</a:t>
+                        <a:t>12.6%</a:t>
                       </a:r>
                     </a:p>
                   </a:txBody>
@@ -5020,7 +5020,7 @@
                         <a:rPr sz="800">
                           <a:latin typeface="Segoe UI"/>
                         </a:rPr>
-                        <a:t>12</a:t>
+                        <a:t>11</a:t>
                       </a:r>
                     </a:p>
                   </a:txBody>

--- a/generated/Tier 1 Broker Scorecards/Insurance Planet_Broker_Scorecard.pptx
+++ b/generated/Tier 1 Broker Scorecards/Insurance Planet_Broker_Scorecard.pptx
@@ -4581,7 +4581,7 @@
                         <a:rPr sz="800">
                           <a:latin typeface="Segoe UI"/>
                         </a:rPr>
-                        <a:t>11.8%</a:t>
+                        <a:t>9.8%</a:t>
                       </a:r>
                     </a:p>
                   </a:txBody>
@@ -4747,7 +4747,7 @@
                         <a:rPr sz="800">
                           <a:latin typeface="Segoe UI"/>
                         </a:rPr>
-                        <a:t>12.6%</a:t>
+                        <a:t>13.8%</a:t>
                       </a:r>
                     </a:p>
                   </a:txBody>
@@ -4866,7 +4866,7 @@
                         <a:rPr sz="800">
                           <a:latin typeface="Segoe UI"/>
                         </a:rPr>
-                        <a:t>6</a:t>
+                        <a:t>5</a:t>
                       </a:r>
                     </a:p>
                   </a:txBody>
@@ -5020,7 +5020,7 @@
                         <a:rPr sz="800">
                           <a:latin typeface="Segoe UI"/>
                         </a:rPr>
-                        <a:t>11</a:t>
+                        <a:t>12</a:t>
                       </a:r>
                     </a:p>
                   </a:txBody>

--- a/generated/Tier 1 Broker Scorecards/Insurance Planet_Broker_Scorecard.pptx
+++ b/generated/Tier 1 Broker Scorecards/Insurance Planet_Broker_Scorecard.pptx
@@ -3394,7 +3394,7 @@
                         <a:rPr sz="900">
                           <a:latin typeface="Segoe UI"/>
                         </a:rPr>
-                        <a:t>Tier 1  |  7.43% / 15.00%</a:t>
+                        <a:t>Tier 1  |  7.09% / 15.00%</a:t>
                       </a:r>
                     </a:p>
                   </a:txBody>
@@ -3690,7 +3690,7 @@
                         <a:rPr sz="900">
                           <a:latin typeface="Segoe UI"/>
                         </a:rPr>
-                        <a:t>Fleet Bound Premium: $225,074.00</a:t>
+                        <a:t>Fleet Bound Premium: $240,248.14</a:t>
                       </a:r>
                     </a:p>
                   </a:txBody>
@@ -3727,7 +3727,7 @@
                         <a:rPr sz="900">
                           <a:latin typeface="Segoe UI"/>
                         </a:rPr>
-                        <a:t>Fleet Book %: 37.0%</a:t>
+                        <a:t>Fleet Book %: 39.5%</a:t>
                       </a:r>
                     </a:p>
                   </a:txBody>
@@ -3766,7 +3766,7 @@
                         <a:rPr sz="900">
                           <a:latin typeface="Segoe UI"/>
                         </a:rPr>
-                        <a:t>Non-Fleet Subs: 268  |  Binds: 19</a:t>
+                        <a:t>Non-Fleet Subs: 268  |  Binds: 18</a:t>
                       </a:r>
                     </a:p>
                   </a:txBody>
@@ -3803,7 +3803,7 @@
                         <a:rPr sz="900">
                           <a:latin typeface="Segoe UI"/>
                         </a:rPr>
-                        <a:t>Non-Fleet Bound Premium: $383,754.85</a:t>
+                        <a:t>Non-Fleet Bound Premium: $368,580.71</a:t>
                       </a:r>
                     </a:p>
                   </a:txBody>
@@ -3840,7 +3840,7 @@
                         <a:rPr sz="900">
                           <a:latin typeface="Segoe UI"/>
                         </a:rPr>
-                        <a:t>Non-Fleet Book %: 63.0%</a:t>
+                        <a:t>Non-Fleet Book %: 60.5%</a:t>
                       </a:r>
                     </a:p>
                   </a:txBody>
@@ -4428,7 +4428,7 @@
                           </a:solidFill>
                           <a:latin typeface="Segoe UI"/>
                         </a:rPr>
-                        <a:t>96</a:t>
+                        <a:t>97</a:t>
                       </a:r>
                     </a:p>
                   </a:txBody>
@@ -4664,7 +4664,7 @@
                         <a:rPr sz="800">
                           <a:latin typeface="Segoe UI"/>
                         </a:rPr>
-                        <a:t>14.5%</a:t>
+                        <a:t>16.4%</a:t>
                       </a:r>
                     </a:p>
                   </a:txBody>
@@ -4707,7 +4707,7 @@
                           </a:solidFill>
                           <a:latin typeface="Segoe UI"/>
                         </a:rPr>
-                        <a:t>13.5%</a:t>
+                        <a:t>13.4%</a:t>
                       </a:r>
                     </a:p>
                   </a:txBody>
@@ -4747,7 +4747,7 @@
                         <a:rPr sz="800">
                           <a:latin typeface="Segoe UI"/>
                         </a:rPr>
-                        <a:t>13.8%</a:t>
+                        <a:t>12.6%</a:t>
                       </a:r>
                     </a:p>
                   </a:txBody>
@@ -4943,7 +4943,7 @@
                         <a:rPr sz="800">
                           <a:latin typeface="Segoe UI"/>
                         </a:rPr>
-                        <a:t>8</a:t>
+                        <a:t>9</a:t>
                       </a:r>
                     </a:p>
                   </a:txBody>
@@ -5020,7 +5020,7 @@
                         <a:rPr sz="800">
                           <a:latin typeface="Segoe UI"/>
                         </a:rPr>
-                        <a:t>12</a:t>
+                        <a:t>11</a:t>
                       </a:r>
                     </a:p>
                   </a:txBody>

--- a/generated/Tier 1 Broker Scorecards/Insurance Planet_Broker_Scorecard.pptx
+++ b/generated/Tier 1 Broker Scorecards/Insurance Planet_Broker_Scorecard.pptx
@@ -3357,7 +3357,7 @@
                         <a:rPr sz="800">
                           <a:latin typeface="Segoe UI"/>
                         </a:rPr>
-                        <a:t>$1,163,462.77 / $1,390,937.73 / $608,828.85</a:t>
+                        <a:t>$1,163,462.77 / $1,314,849.75 / $608,828.85</a:t>
                       </a:r>
                     </a:p>
                   </a:txBody>
@@ -4581,7 +4581,7 @@
                         <a:rPr sz="800">
                           <a:latin typeface="Segoe UI"/>
                         </a:rPr>
-                        <a:t>9.8%</a:t>
+                        <a:t>11.8%</a:t>
                       </a:r>
                     </a:p>
                   </a:txBody>
@@ -4866,7 +4866,7 @@
                         <a:rPr sz="800">
                           <a:latin typeface="Segoe UI"/>
                         </a:rPr>
-                        <a:t>5</a:t>
+                        <a:t>6</a:t>
                       </a:r>
                     </a:p>
                   </a:txBody>
